--- a/docs/musely_기획.pptx
+++ b/docs/musely_기획.pptx
@@ -9896,7 +9896,7 @@
         </p:nvSpPr>
         <p:spPr>
           <a:xfrm>
-            <a:off x="6309360" y="1828800"/>
+            <a:off x="4567634" y="1828800"/>
             <a:ext cx="5166360" cy="365760"/>
           </a:xfrm>
           <a:prstGeom prst="rect">
@@ -9913,7 +9913,7 @@
               <a:buNone/>
             </a:pPr>
             <a:r>
-              <a:rPr lang="en-US" sz="1900" b="1" dirty="0">
+              <a:rPr lang="ko-KR" altLang="en-US" sz="1900" b="1" dirty="0">
                 <a:solidFill>
                   <a:srgbClr val="FFFFFF"/>
                 </a:solidFill>
@@ -9921,7 +9921,29 @@
                 <a:ea typeface="Cambria" pitchFamily="34" charset="-122"/>
                 <a:cs typeface="Cambria" pitchFamily="34" charset="-120"/>
               </a:rPr>
-              <a:t>성미 — 백엔드 · 통합</a:t>
+              <a:t>곽</a:t>
+            </a:r>
+            <a:r>
+              <a:rPr lang="en-US" sz="1900" b="1" dirty="0" err="1">
+                <a:solidFill>
+                  <a:srgbClr val="FFFFFF"/>
+                </a:solidFill>
+                <a:latin typeface="Cambria" pitchFamily="34" charset="0"/>
+                <a:ea typeface="Cambria" pitchFamily="34" charset="-122"/>
+                <a:cs typeface="Cambria" pitchFamily="34" charset="-120"/>
+              </a:rPr>
+              <a:t>성미</a:t>
+            </a:r>
+            <a:r>
+              <a:rPr lang="en-US" sz="1900" b="1" dirty="0">
+                <a:solidFill>
+                  <a:srgbClr val="FFFFFF"/>
+                </a:solidFill>
+                <a:latin typeface="Cambria" pitchFamily="34" charset="0"/>
+                <a:ea typeface="Cambria" pitchFamily="34" charset="-122"/>
+                <a:cs typeface="Cambria" pitchFamily="34" charset="-120"/>
+              </a:rPr>
+              <a:t> — 백엔드 · 통합</a:t>
             </a:r>
             <a:endParaRPr lang="en-US" sz="1900" dirty="0"/>
           </a:p>
@@ -9935,7 +9957,7 @@
         </p:nvSpPr>
         <p:spPr>
           <a:xfrm>
-            <a:off x="6309360" y="2286000"/>
+            <a:off x="4567634" y="2286000"/>
             <a:ext cx="4892040" cy="1371600"/>
           </a:xfrm>
           <a:prstGeom prst="rect">
@@ -10213,6 +10235,111 @@
               <a:t>musely</a:t>
             </a:r>
             <a:endParaRPr lang="en-US" sz="1500" dirty="0"/>
+          </a:p>
+        </p:txBody>
+      </p:sp>
+      <p:sp>
+        <p:nvSpPr>
+          <p:cNvPr id="13" name="Text 5">
+            <a:extLst>
+              <a:ext uri="{FF2B5EF4-FFF2-40B4-BE49-F238E27FC236}">
+                <a16:creationId xmlns:a16="http://schemas.microsoft.com/office/drawing/2014/main" id="{D1951C93-F4A0-63D4-DE75-1A1AFD467EC4}"/>
+              </a:ext>
+            </a:extLst>
+          </p:cNvPr>
+          <p:cNvSpPr txBox="1"/>
+          <p:nvPr/>
+        </p:nvSpPr>
+        <p:spPr>
+          <a:xfrm>
+            <a:off x="8238744" y="1828800"/>
+            <a:ext cx="5166360" cy="365760"/>
+          </a:xfrm>
+          <a:prstGeom prst="rect">
+            <a:avLst/>
+          </a:prstGeom>
+          <a:noFill/>
+          <a:ln/>
+        </p:spPr>
+        <p:txBody>
+          <a:bodyPr wrap="square" lIns="0" tIns="0" rIns="0" bIns="0" rtlCol="0" anchor="ctr"/>
+          <a:lstStyle/>
+          <a:p>
+            <a:pPr marL="0" indent="0">
+              <a:buNone/>
+            </a:pPr>
+            <a:r>
+              <a:rPr lang="ko-KR" altLang="en-US" sz="1900" b="1" dirty="0">
+                <a:solidFill>
+                  <a:srgbClr val="FFFFFF"/>
+                </a:solidFill>
+                <a:latin typeface="Cambria" pitchFamily="34" charset="0"/>
+                <a:ea typeface="Cambria" pitchFamily="34" charset="-122"/>
+                <a:cs typeface="Cambria" pitchFamily="34" charset="-120"/>
+              </a:rPr>
+              <a:t>김소연 </a:t>
+            </a:r>
+            <a:r>
+              <a:rPr lang="en-US" sz="1900" b="1" dirty="0">
+                <a:solidFill>
+                  <a:srgbClr val="FFFFFF"/>
+                </a:solidFill>
+                <a:latin typeface="Cambria" pitchFamily="34" charset="0"/>
+                <a:ea typeface="Cambria" pitchFamily="34" charset="-122"/>
+                <a:cs typeface="Cambria" pitchFamily="34" charset="-120"/>
+              </a:rPr>
+              <a:t>— </a:t>
+            </a:r>
+            <a:r>
+              <a:rPr lang="ko-KR" altLang="en-US" sz="1900" b="1" dirty="0">
+                <a:solidFill>
+                  <a:srgbClr val="FFFFFF"/>
+                </a:solidFill>
+                <a:latin typeface="Cambria" pitchFamily="34" charset="0"/>
+                <a:ea typeface="Cambria" pitchFamily="34" charset="-122"/>
+                <a:cs typeface="Cambria" pitchFamily="34" charset="-120"/>
+              </a:rPr>
+              <a:t>디자인</a:t>
+            </a:r>
+            <a:endParaRPr lang="en-US" sz="1900" dirty="0"/>
+          </a:p>
+        </p:txBody>
+      </p:sp>
+      <p:sp>
+        <p:nvSpPr>
+          <p:cNvPr id="14" name="Text 6">
+            <a:extLst>
+              <a:ext uri="{FF2B5EF4-FFF2-40B4-BE49-F238E27FC236}">
+                <a16:creationId xmlns:a16="http://schemas.microsoft.com/office/drawing/2014/main" id="{5B15F834-070A-5FBF-5DAB-96A2CBF4AEAF}"/>
+              </a:ext>
+            </a:extLst>
+          </p:cNvPr>
+          <p:cNvSpPr txBox="1"/>
+          <p:nvPr/>
+        </p:nvSpPr>
+        <p:spPr>
+          <a:xfrm>
+            <a:off x="8238744" y="2286000"/>
+            <a:ext cx="4892040" cy="1371600"/>
+          </a:xfrm>
+          <a:prstGeom prst="rect">
+            <a:avLst/>
+          </a:prstGeom>
+          <a:noFill/>
+          <a:ln/>
+        </p:spPr>
+        <p:txBody>
+          <a:bodyPr wrap="square" lIns="0" tIns="0" rIns="0" bIns="0" rtlCol="0" anchor="ctr"/>
+          <a:lstStyle/>
+          <a:p>
+            <a:pPr marL="342900" indent="-342900">
+              <a:spcAft>
+                <a:spcPts val="600"/>
+              </a:spcAft>
+              <a:buSzPct val="100000"/>
+              <a:buChar char="•"/>
+            </a:pPr>
+            <a:endParaRPr lang="en-US" sz="1250" dirty="0"/>
           </a:p>
         </p:txBody>
       </p:sp>
